--- a/presentation/Handling_Overruns_Final_Seminar_Presentation_v3_slide2_overruns.pptx
+++ b/presentation/Handling_Overruns_Final_Seminar_Presentation_v3_slide2_overruns.pptx
@@ -3,24 +3,25 @@
 <p:presentation xmlns:a="http://schemas.openxmlformats.org/drawingml/2006/main" xmlns:r="http://schemas.openxmlformats.org/officeDocument/2006/relationships" xmlns:p="http://schemas.openxmlformats.org/presentationml/2006/main" saveSubsetFonts="1" autoCompressPictures="0">
   <p:sldMasterIdLst>
     <p:sldMasterId id="2147483648" r:id="rId1"/>
+    <p:sldMasterId id="2147483651" r:id="rId2"/>
   </p:sldMasterIdLst>
   <p:notesMasterIdLst>
-    <p:notesMasterId r:id="rId15"/>
+    <p:notesMasterId r:id="rId16"/>
   </p:notesMasterIdLst>
   <p:sldIdLst>
-    <p:sldId id="256" r:id="rId2"/>
-    <p:sldId id="257" r:id="rId3"/>
-    <p:sldId id="258" r:id="rId4"/>
-    <p:sldId id="259" r:id="rId5"/>
-    <p:sldId id="260" r:id="rId6"/>
-    <p:sldId id="268" r:id="rId7"/>
-    <p:sldId id="261" r:id="rId8"/>
-    <p:sldId id="262" r:id="rId9"/>
-    <p:sldId id="263" r:id="rId10"/>
-    <p:sldId id="264" r:id="rId11"/>
-    <p:sldId id="265" r:id="rId12"/>
-    <p:sldId id="266" r:id="rId13"/>
-    <p:sldId id="267" r:id="rId14"/>
+    <p:sldId id="269" r:id="rId3"/>
+    <p:sldId id="257" r:id="rId4"/>
+    <p:sldId id="258" r:id="rId5"/>
+    <p:sldId id="259" r:id="rId6"/>
+    <p:sldId id="260" r:id="rId7"/>
+    <p:sldId id="268" r:id="rId8"/>
+    <p:sldId id="261" r:id="rId9"/>
+    <p:sldId id="262" r:id="rId10"/>
+    <p:sldId id="263" r:id="rId11"/>
+    <p:sldId id="264" r:id="rId12"/>
+    <p:sldId id="265" r:id="rId13"/>
+    <p:sldId id="266" r:id="rId14"/>
+    <p:sldId id="267" r:id="rId15"/>
   </p:sldIdLst>
   <p:sldSz cx="12192000" cy="6858000"/>
   <p:notesSz cx="6858000" cy="12192000"/>
@@ -312,11 +313,71 @@
           <a:bodyPr/>
           <a:lstStyle/>
           <a:p>
+            <a:pPr marL="0" marR="0" lvl="0" indent="0" algn="l" defTabSz="914400" rtl="0" eaLnBrk="1" fontAlgn="auto" latinLnBrk="0" hangingPunct="1">
+              <a:lnSpc>
+                <a:spcPct val="100000"/>
+              </a:lnSpc>
+              <a:spcBef>
+                <a:spcPts val="0"/>
+              </a:spcBef>
+              <a:spcAft>
+                <a:spcPts val="0"/>
+              </a:spcAft>
+              <a:buClrTx/>
+              <a:buSzTx/>
+              <a:buFontTx/>
+              <a:buNone/>
+              <a:tabLst/>
+              <a:defRPr/>
+            </a:pPr>
             <a:fld id="{F7021451-1387-4CA6-816F-3879F97B5CBC}" type="slidenum">
-              <a:rPr lang="en-US"/>
+              <a:rPr kumimoji="0" lang="en-US" sz="1800" b="0" i="0" u="none" strike="noStrike" kern="1200" cap="none" spc="0" normalizeH="0" baseline="0" noProof="0">
+                <a:ln>
+                  <a:noFill/>
+                </a:ln>
+                <a:solidFill>
+                  <a:prstClr val="black"/>
+                </a:solidFill>
+                <a:effectLst/>
+                <a:uLnTx/>
+                <a:uFillTx/>
+                <a:latin typeface="Aptos" panose="02110004020202020204"/>
+                <a:ea typeface="+mn-ea"/>
+                <a:cs typeface="+mn-cs"/>
+              </a:rPr>
+              <a:pPr marL="0" marR="0" lvl="0" indent="0" algn="l" defTabSz="914400" rtl="0" eaLnBrk="1" fontAlgn="auto" latinLnBrk="0" hangingPunct="1">
+                <a:lnSpc>
+                  <a:spcPct val="100000"/>
+                </a:lnSpc>
+                <a:spcBef>
+                  <a:spcPts val="0"/>
+                </a:spcBef>
+                <a:spcAft>
+                  <a:spcPts val="0"/>
+                </a:spcAft>
+                <a:buClrTx/>
+                <a:buSzTx/>
+                <a:buFontTx/>
+                <a:buNone/>
+                <a:tabLst/>
+                <a:defRPr/>
+              </a:pPr>
               <a:t>1</a:t>
             </a:fld>
-            <a:endParaRPr lang="en-US"/>
+            <a:endParaRPr kumimoji="0" lang="en-US" sz="1800" b="0" i="0" u="none" strike="noStrike" kern="1200" cap="none" spc="0" normalizeH="0" baseline="0" noProof="0">
+              <a:ln>
+                <a:noFill/>
+              </a:ln>
+              <a:solidFill>
+                <a:prstClr val="black"/>
+              </a:solidFill>
+              <a:effectLst/>
+              <a:uLnTx/>
+              <a:uFillTx/>
+              <a:latin typeface="Aptos" panose="02110004020202020204"/>
+              <a:ea typeface="+mn-ea"/>
+              <a:cs typeface="+mn-cs"/>
+            </a:endParaRPr>
           </a:p>
         </p:txBody>
       </p:sp>
@@ -1396,7 +1457,7 @@
           </a:prstGeom>
           <a:extLst>
             <a:ext uri="{C572A759-6A51-4108-AA02-DFA0A04FC94B}">
-              <ma14:wrappingTextBoxFlag xmlns="" xmlns:ma14="http://schemas.microsoft.com/office/mac/drawingml/2011/main" val="0"/>
+              <ma14:wrappingTextBoxFlag xmlns:ma14="http://schemas.microsoft.com/office/mac/drawingml/2011/main" xmlns="" val="0"/>
             </a:ext>
           </a:extLst>
         </p:spPr>
@@ -1425,6 +1486,196 @@
         </p:txBody>
       </p:sp>
     </p:spTree>
+  </p:cSld>
+  <p:clrMapOvr>
+    <a:masterClrMapping/>
+  </p:clrMapOvr>
+</p:sldLayout>
+</file>
+
+<file path=ppt/slideLayouts/slideLayout3.xml><?xml version="1.0" encoding="utf-8"?>
+<p:sldLayout xmlns:a="http://schemas.openxmlformats.org/drawingml/2006/main" xmlns:r="http://schemas.openxmlformats.org/officeDocument/2006/relationships" xmlns:p="http://schemas.openxmlformats.org/presentationml/2006/main" preserve="1">
+  <p:cSld name="DEFAULT">
+    <p:bg>
+      <p:bgRef idx="1001">
+        <a:schemeClr val="bg1"/>
+      </p:bgRef>
+    </p:bg>
+    <p:spTree>
+      <p:nvGrpSpPr>
+        <p:cNvPr id="1" name=""/>
+        <p:cNvGrpSpPr/>
+        <p:nvPr/>
+      </p:nvGrpSpPr>
+      <p:grpSpPr>
+        <a:xfrm>
+          <a:off x="0" y="0"/>
+          <a:ext cx="0" cy="0"/>
+          <a:chOff x="0" y="0"/>
+          <a:chExt cx="0" cy="0"/>
+        </a:xfrm>
+      </p:grpSpPr>
+    </p:spTree>
+    <p:extLst>
+      <p:ext uri="{BB962C8B-B14F-4D97-AF65-F5344CB8AC3E}">
+        <p14:creationId xmlns:p14="http://schemas.microsoft.com/office/powerpoint/2010/main" val="1874466342"/>
+      </p:ext>
+    </p:extLst>
+  </p:cSld>
+  <p:clrMapOvr>
+    <a:masterClrMapping/>
+  </p:clrMapOvr>
+</p:sldLayout>
+</file>
+
+<file path=ppt/slideLayouts/slideLayout4.xml><?xml version="1.0" encoding="utf-8"?>
+<p:sldLayout xmlns:a="http://schemas.openxmlformats.org/drawingml/2006/main" xmlns:r="http://schemas.openxmlformats.org/officeDocument/2006/relationships" xmlns:p="http://schemas.openxmlformats.org/presentationml/2006/main" preserve="1">
+  <p:cSld name="MASTER">
+    <p:bg>
+      <p:bgPr>
+        <a:solidFill>
+          <a:srgbClr val="F7F9FC"/>
+        </a:solidFill>
+        <a:effectLst/>
+      </p:bgPr>
+    </p:bg>
+    <p:spTree>
+      <p:nvGrpSpPr>
+        <p:cNvPr id="1" name=""/>
+        <p:cNvGrpSpPr/>
+        <p:nvPr/>
+      </p:nvGrpSpPr>
+      <p:grpSpPr>
+        <a:xfrm>
+          <a:off x="0" y="0"/>
+          <a:ext cx="0" cy="0"/>
+          <a:chOff x="0" y="0"/>
+          <a:chExt cx="0" cy="0"/>
+        </a:xfrm>
+      </p:grpSpPr>
+      <p:sp>
+        <p:nvSpPr>
+          <p:cNvPr id="2" name="Shape 0"/>
+          <p:cNvSpPr/>
+          <p:nvPr/>
+        </p:nvSpPr>
+        <p:spPr>
+          <a:xfrm>
+            <a:off x="502920" y="6547104"/>
+            <a:ext cx="11201400" cy="0"/>
+          </a:xfrm>
+          <a:prstGeom prst="line">
+            <a:avLst/>
+          </a:prstGeom>
+          <a:noFill/>
+          <a:ln w="12700">
+            <a:solidFill>
+              <a:srgbClr val="D9E2EF"/>
+            </a:solidFill>
+            <a:prstDash val="solid"/>
+          </a:ln>
+        </p:spPr>
+        <p:txBody>
+          <a:bodyPr/>
+          <a:lstStyle/>
+          <a:p>
+            <a:endParaRPr lang="en-GB"/>
+          </a:p>
+        </p:txBody>
+      </p:sp>
+      <p:sp>
+        <p:nvSpPr>
+          <p:cNvPr id="3" name="Text 1"/>
+          <p:cNvSpPr/>
+          <p:nvPr/>
+        </p:nvSpPr>
+        <p:spPr>
+          <a:xfrm>
+            <a:off x="502920" y="6565392"/>
+            <a:ext cx="5669280" cy="182880"/>
+          </a:xfrm>
+          <a:prstGeom prst="rect">
+            <a:avLst/>
+          </a:prstGeom>
+          <a:noFill/>
+          <a:ln/>
+        </p:spPr>
+        <p:txBody>
+          <a:bodyPr wrap="square" rtlCol="0" anchor="ctr"/>
+          <a:lstStyle/>
+          <a:p>
+            <a:pPr marL="0" indent="0">
+              <a:buNone/>
+            </a:pPr>
+            <a:r>
+              <a:rPr lang="en-US" sz="780" dirty="0">
+                <a:solidFill>
+                  <a:srgbClr val="6D7B90"/>
+                </a:solidFill>
+                <a:latin typeface="Aptos" pitchFamily="34" charset="0"/>
+                <a:ea typeface="Aptos" pitchFamily="34" charset="-122"/>
+                <a:cs typeface="Aptos" pitchFamily="34" charset="-120"/>
+              </a:rPr>
+              <a:t>Handling Execution Overruns • Seminar Project</a:t>
+            </a:r>
+            <a:endParaRPr lang="en-US" sz="780" dirty="0"/>
+          </a:p>
+        </p:txBody>
+      </p:sp>
+      <p:sp>
+        <p:nvSpPr>
+          <p:cNvPr id="25" name="Slide Number Placeholder 0"/>
+          <p:cNvSpPr>
+            <a:spLocks noGrp="1"/>
+          </p:cNvSpPr>
+          <p:nvPr>
+            <p:ph type="sldNum" sz="quarter" idx="4294967295"/>
+          </p:nvPr>
+        </p:nvSpPr>
+        <p:spPr>
+          <a:xfrm>
+            <a:off x="11503152" y="6565392"/>
+            <a:ext cx="800000" cy="300000"/>
+          </a:xfrm>
+          <a:prstGeom prst="rect">
+            <a:avLst/>
+          </a:prstGeom>
+          <a:extLst>
+            <a:ext uri="{C572A759-6A51-4108-AA02-DFA0A04FC94B}">
+              <ma14:wrappingTextBoxFlag xmlns:ma14="http://schemas.microsoft.com/office/mac/drawingml/2011/main" xmlns="" val="0"/>
+            </a:ext>
+          </a:extLst>
+        </p:spPr>
+        <p:txBody>
+          <a:bodyPr/>
+          <a:lstStyle>
+            <a:lvl1pPr>
+              <a:defRPr sz="800">
+                <a:solidFill>
+                  <a:srgbClr val="6D7B90"/>
+                </a:solidFill>
+                <a:latin typeface="Aptos"/>
+                <a:ea typeface="Aptos"/>
+                <a:cs typeface="Aptos"/>
+              </a:defRPr>
+            </a:lvl1pPr>
+          </a:lstStyle>
+          <a:p>
+            <a:pPr algn="l"/>
+            <a:fld id="{F7021451-1387-4CA6-816F-3879F97B5CBC}" type="slidenum">
+              <a:rPr lang="en-US" b="0"/>
+              <a:t>‹#›</a:t>
+            </a:fld>
+            <a:endParaRPr lang="en-US"/>
+          </a:p>
+        </p:txBody>
+      </p:sp>
+    </p:spTree>
+    <p:extLst>
+      <p:ext uri="{BB962C8B-B14F-4D97-AF65-F5344CB8AC3E}">
+        <p14:creationId xmlns:p14="http://schemas.microsoft.com/office/powerpoint/2010/main" val="1043497180"/>
+      </p:ext>
+    </p:extLst>
   </p:cSld>
   <p:clrMapOvr>
     <a:masterClrMapping/>
@@ -1474,7 +1725,7 @@
           </a:prstGeom>
           <a:extLst>
             <a:ext uri="{C572A759-6A51-4108-AA02-DFA0A04FC94B}">
-              <ma14:wrappingTextBoxFlag xmlns="" xmlns:ma14="http://schemas.microsoft.com/office/mac/drawingml/2011/main" val="0"/>
+              <ma14:wrappingTextBoxFlag xmlns:ma14="http://schemas.microsoft.com/office/mac/drawingml/2011/main" xmlns="" val="0"/>
             </a:ext>
           </a:extLst>
         </p:spPr>
@@ -1763,13 +2014,349 @@
 </p:sldMaster>
 </file>
 
+<file path=ppt/slideMasters/slideMaster2.xml><?xml version="1.0" encoding="utf-8"?>
+<p:sldMaster xmlns:a="http://schemas.openxmlformats.org/drawingml/2006/main" xmlns:r="http://schemas.openxmlformats.org/officeDocument/2006/relationships" xmlns:p="http://schemas.openxmlformats.org/presentationml/2006/main">
+  <p:cSld>
+    <p:bg>
+      <p:bgRef idx="1001">
+        <a:schemeClr val="bg1"/>
+      </p:bgRef>
+    </p:bg>
+    <p:spTree>
+      <p:nvGrpSpPr>
+        <p:cNvPr id="1" name=""/>
+        <p:cNvGrpSpPr/>
+        <p:nvPr/>
+      </p:nvGrpSpPr>
+      <p:grpSpPr>
+        <a:xfrm>
+          <a:off x="0" y="0"/>
+          <a:ext cx="0" cy="0"/>
+          <a:chOff x="0" y="0"/>
+          <a:chExt cx="0" cy="0"/>
+        </a:xfrm>
+      </p:grpSpPr>
+      <p:sp>
+        <p:nvSpPr>
+          <p:cNvPr id="25" name="Slide Number Placeholder 0"/>
+          <p:cNvSpPr>
+            <a:spLocks noGrp="1"/>
+          </p:cNvSpPr>
+          <p:nvPr>
+            <p:ph type="sldNum" sz="quarter" idx="4294967295"/>
+          </p:nvPr>
+        </p:nvSpPr>
+        <p:spPr>
+          <a:xfrm>
+            <a:off x="11503152" y="6565392"/>
+            <a:ext cx="800000" cy="300000"/>
+          </a:xfrm>
+          <a:prstGeom prst="rect">
+            <a:avLst/>
+          </a:prstGeom>
+          <a:extLst>
+            <a:ext uri="{C572A759-6A51-4108-AA02-DFA0A04FC94B}">
+              <ma14:wrappingTextBoxFlag xmlns:ma14="http://schemas.microsoft.com/office/mac/drawingml/2011/main" xmlns="" val="0"/>
+            </a:ext>
+          </a:extLst>
+        </p:spPr>
+        <p:txBody>
+          <a:bodyPr/>
+          <a:lstStyle>
+            <a:lvl1pPr>
+              <a:defRPr sz="800">
+                <a:solidFill>
+                  <a:srgbClr val="6D7B90"/>
+                </a:solidFill>
+                <a:latin typeface="Aptos"/>
+                <a:ea typeface="Aptos"/>
+                <a:cs typeface="Aptos"/>
+              </a:defRPr>
+            </a:lvl1pPr>
+          </a:lstStyle>
+          <a:p>
+            <a:pPr algn="l"/>
+            <a:fld id="{F7021451-1387-4CA6-816F-3879F97B5CBC}" type="slidenum">
+              <a:rPr lang="en-US" b="0"/>
+              <a:t>‹#›</a:t>
+            </a:fld>
+            <a:endParaRPr lang="en-US"/>
+          </a:p>
+        </p:txBody>
+      </p:sp>
+    </p:spTree>
+    <p:extLst>
+      <p:ext uri="{BB962C8B-B14F-4D97-AF65-F5344CB8AC3E}">
+        <p14:creationId xmlns:p14="http://schemas.microsoft.com/office/powerpoint/2010/main" val="3390088409"/>
+      </p:ext>
+    </p:extLst>
+  </p:cSld>
+  <p:clrMap bg1="lt1" tx1="dk1" bg2="lt2" tx2="dk2" accent1="accent1" accent2="accent2" accent3="accent3" accent4="accent4" accent5="accent5" accent6="accent6" hlink="hlink" folHlink="folHlink"/>
+  <p:sldLayoutIdLst>
+    <p:sldLayoutId id="2147483652" r:id="rId1"/>
+    <p:sldLayoutId id="2147483653" r:id="rId2"/>
+  </p:sldLayoutIdLst>
+  <p:hf sldNum="0" hdr="0" ftr="0" dt="0"/>
+  <p:txStyles>
+    <p:titleStyle>
+      <a:lvl1pPr algn="ctr" defTabSz="914400" rtl="0" eaLnBrk="1" latinLnBrk="0" hangingPunct="1">
+        <a:spcBef>
+          <a:spcPct val="0"/>
+        </a:spcBef>
+        <a:buNone/>
+        <a:defRPr sz="4400" kern="1200">
+          <a:solidFill>
+            <a:schemeClr val="tx1"/>
+          </a:solidFill>
+          <a:latin typeface="+mj-lt"/>
+          <a:ea typeface="+mj-ea"/>
+          <a:cs typeface="+mj-cs"/>
+        </a:defRPr>
+      </a:lvl1pPr>
+    </p:titleStyle>
+    <p:bodyStyle>
+      <a:lvl1pPr marL="342900" indent="-342900" algn="l" defTabSz="914400" rtl="0" eaLnBrk="1" latinLnBrk="0" hangingPunct="1">
+        <a:spcBef>
+          <a:spcPct val="20000"/>
+        </a:spcBef>
+        <a:buFont typeface="Arial" pitchFamily="34" charset="0"/>
+        <a:buChar char="•"/>
+        <a:defRPr sz="3200" kern="1200">
+          <a:solidFill>
+            <a:schemeClr val="tx1"/>
+          </a:solidFill>
+          <a:latin typeface="+mn-lt"/>
+          <a:ea typeface="+mn-ea"/>
+          <a:cs typeface="+mn-cs"/>
+        </a:defRPr>
+      </a:lvl1pPr>
+      <a:lvl2pPr marL="742950" indent="-285750" algn="l" defTabSz="914400" rtl="0" eaLnBrk="1" latinLnBrk="0" hangingPunct="1">
+        <a:spcBef>
+          <a:spcPct val="20000"/>
+        </a:spcBef>
+        <a:buFont typeface="Arial" pitchFamily="34" charset="0"/>
+        <a:buChar char="–"/>
+        <a:defRPr sz="2800" kern="1200">
+          <a:solidFill>
+            <a:schemeClr val="tx1"/>
+          </a:solidFill>
+          <a:latin typeface="+mn-lt"/>
+          <a:ea typeface="+mn-ea"/>
+          <a:cs typeface="+mn-cs"/>
+        </a:defRPr>
+      </a:lvl2pPr>
+      <a:lvl3pPr marL="1143000" indent="-228600" algn="l" defTabSz="914400" rtl="0" eaLnBrk="1" latinLnBrk="0" hangingPunct="1">
+        <a:spcBef>
+          <a:spcPct val="20000"/>
+        </a:spcBef>
+        <a:buFont typeface="Arial" pitchFamily="34" charset="0"/>
+        <a:buChar char="•"/>
+        <a:defRPr sz="2400" kern="1200">
+          <a:solidFill>
+            <a:schemeClr val="tx1"/>
+          </a:solidFill>
+          <a:latin typeface="+mn-lt"/>
+          <a:ea typeface="+mn-ea"/>
+          <a:cs typeface="+mn-cs"/>
+        </a:defRPr>
+      </a:lvl3pPr>
+      <a:lvl4pPr marL="1600200" indent="-228600" algn="l" defTabSz="914400" rtl="0" eaLnBrk="1" latinLnBrk="0" hangingPunct="1">
+        <a:spcBef>
+          <a:spcPct val="20000"/>
+        </a:spcBef>
+        <a:buFont typeface="Arial" pitchFamily="34" charset="0"/>
+        <a:buChar char="–"/>
+        <a:defRPr sz="2000" kern="1200">
+          <a:solidFill>
+            <a:schemeClr val="tx1"/>
+          </a:solidFill>
+          <a:latin typeface="+mn-lt"/>
+          <a:ea typeface="+mn-ea"/>
+          <a:cs typeface="+mn-cs"/>
+        </a:defRPr>
+      </a:lvl4pPr>
+      <a:lvl5pPr marL="2057400" indent="-228600" algn="l" defTabSz="914400" rtl="0" eaLnBrk="1" latinLnBrk="0" hangingPunct="1">
+        <a:spcBef>
+          <a:spcPct val="20000"/>
+        </a:spcBef>
+        <a:buFont typeface="Arial" pitchFamily="34" charset="0"/>
+        <a:buChar char="»"/>
+        <a:defRPr sz="2000" kern="1200">
+          <a:solidFill>
+            <a:schemeClr val="tx1"/>
+          </a:solidFill>
+          <a:latin typeface="+mn-lt"/>
+          <a:ea typeface="+mn-ea"/>
+          <a:cs typeface="+mn-cs"/>
+        </a:defRPr>
+      </a:lvl5pPr>
+      <a:lvl6pPr marL="2514600" indent="-228600" algn="l" defTabSz="914400" rtl="0" eaLnBrk="1" latinLnBrk="0" hangingPunct="1">
+        <a:spcBef>
+          <a:spcPct val="20000"/>
+        </a:spcBef>
+        <a:buFont typeface="Arial" pitchFamily="34" charset="0"/>
+        <a:buChar char="•"/>
+        <a:defRPr sz="2000" kern="1200">
+          <a:solidFill>
+            <a:schemeClr val="tx1"/>
+          </a:solidFill>
+          <a:latin typeface="+mn-lt"/>
+          <a:ea typeface="+mn-ea"/>
+          <a:cs typeface="+mn-cs"/>
+        </a:defRPr>
+      </a:lvl6pPr>
+      <a:lvl7pPr marL="2971800" indent="-228600" algn="l" defTabSz="914400" rtl="0" eaLnBrk="1" latinLnBrk="0" hangingPunct="1">
+        <a:spcBef>
+          <a:spcPct val="20000"/>
+        </a:spcBef>
+        <a:buFont typeface="Arial" pitchFamily="34" charset="0"/>
+        <a:buChar char="•"/>
+        <a:defRPr sz="2000" kern="1200">
+          <a:solidFill>
+            <a:schemeClr val="tx1"/>
+          </a:solidFill>
+          <a:latin typeface="+mn-lt"/>
+          <a:ea typeface="+mn-ea"/>
+          <a:cs typeface="+mn-cs"/>
+        </a:defRPr>
+      </a:lvl7pPr>
+      <a:lvl8pPr marL="3429000" indent="-228600" algn="l" defTabSz="914400" rtl="0" eaLnBrk="1" latinLnBrk="0" hangingPunct="1">
+        <a:spcBef>
+          <a:spcPct val="20000"/>
+        </a:spcBef>
+        <a:buFont typeface="Arial" pitchFamily="34" charset="0"/>
+        <a:buChar char="•"/>
+        <a:defRPr sz="2000" kern="1200">
+          <a:solidFill>
+            <a:schemeClr val="tx1"/>
+          </a:solidFill>
+          <a:latin typeface="+mn-lt"/>
+          <a:ea typeface="+mn-ea"/>
+          <a:cs typeface="+mn-cs"/>
+        </a:defRPr>
+      </a:lvl8pPr>
+      <a:lvl9pPr marL="3886200" indent="-228600" algn="l" defTabSz="914400" rtl="0" eaLnBrk="1" latinLnBrk="0" hangingPunct="1">
+        <a:spcBef>
+          <a:spcPct val="20000"/>
+        </a:spcBef>
+        <a:buFont typeface="Arial" pitchFamily="34" charset="0"/>
+        <a:buChar char="•"/>
+        <a:defRPr sz="2000" kern="1200">
+          <a:solidFill>
+            <a:schemeClr val="tx1"/>
+          </a:solidFill>
+          <a:latin typeface="+mn-lt"/>
+          <a:ea typeface="+mn-ea"/>
+          <a:cs typeface="+mn-cs"/>
+        </a:defRPr>
+      </a:lvl9pPr>
+    </p:bodyStyle>
+    <p:otherStyle>
+      <a:defPPr>
+        <a:defRPr lang="en-US"/>
+      </a:defPPr>
+      <a:lvl1pPr marL="0" algn="l" defTabSz="914400" rtl="0" eaLnBrk="1" latinLnBrk="0" hangingPunct="1">
+        <a:defRPr sz="1800" kern="1200">
+          <a:solidFill>
+            <a:schemeClr val="tx1"/>
+          </a:solidFill>
+          <a:latin typeface="+mn-lt"/>
+          <a:ea typeface="+mn-ea"/>
+          <a:cs typeface="+mn-cs"/>
+        </a:defRPr>
+      </a:lvl1pPr>
+      <a:lvl2pPr marL="457200" algn="l" defTabSz="914400" rtl="0" eaLnBrk="1" latinLnBrk="0" hangingPunct="1">
+        <a:defRPr sz="1800" kern="1200">
+          <a:solidFill>
+            <a:schemeClr val="tx1"/>
+          </a:solidFill>
+          <a:latin typeface="+mn-lt"/>
+          <a:ea typeface="+mn-ea"/>
+          <a:cs typeface="+mn-cs"/>
+        </a:defRPr>
+      </a:lvl2pPr>
+      <a:lvl3pPr marL="914400" algn="l" defTabSz="914400" rtl="0" eaLnBrk="1" latinLnBrk="0" hangingPunct="1">
+        <a:defRPr sz="1800" kern="1200">
+          <a:solidFill>
+            <a:schemeClr val="tx1"/>
+          </a:solidFill>
+          <a:latin typeface="+mn-lt"/>
+          <a:ea typeface="+mn-ea"/>
+          <a:cs typeface="+mn-cs"/>
+        </a:defRPr>
+      </a:lvl3pPr>
+      <a:lvl4pPr marL="1371600" algn="l" defTabSz="914400" rtl="0" eaLnBrk="1" latinLnBrk="0" hangingPunct="1">
+        <a:defRPr sz="1800" kern="1200">
+          <a:solidFill>
+            <a:schemeClr val="tx1"/>
+          </a:solidFill>
+          <a:latin typeface="+mn-lt"/>
+          <a:ea typeface="+mn-ea"/>
+          <a:cs typeface="+mn-cs"/>
+        </a:defRPr>
+      </a:lvl4pPr>
+      <a:lvl5pPr marL="1828800" algn="l" defTabSz="914400" rtl="0" eaLnBrk="1" latinLnBrk="0" hangingPunct="1">
+        <a:defRPr sz="1800" kern="1200">
+          <a:solidFill>
+            <a:schemeClr val="tx1"/>
+          </a:solidFill>
+          <a:latin typeface="+mn-lt"/>
+          <a:ea typeface="+mn-ea"/>
+          <a:cs typeface="+mn-cs"/>
+        </a:defRPr>
+      </a:lvl5pPr>
+      <a:lvl6pPr marL="2286000" algn="l" defTabSz="914400" rtl="0" eaLnBrk="1" latinLnBrk="0" hangingPunct="1">
+        <a:defRPr sz="1800" kern="1200">
+          <a:solidFill>
+            <a:schemeClr val="tx1"/>
+          </a:solidFill>
+          <a:latin typeface="+mn-lt"/>
+          <a:ea typeface="+mn-ea"/>
+          <a:cs typeface="+mn-cs"/>
+        </a:defRPr>
+      </a:lvl6pPr>
+      <a:lvl7pPr marL="2743200" algn="l" defTabSz="914400" rtl="0" eaLnBrk="1" latinLnBrk="0" hangingPunct="1">
+        <a:defRPr sz="1800" kern="1200">
+          <a:solidFill>
+            <a:schemeClr val="tx1"/>
+          </a:solidFill>
+          <a:latin typeface="+mn-lt"/>
+          <a:ea typeface="+mn-ea"/>
+          <a:cs typeface="+mn-cs"/>
+        </a:defRPr>
+      </a:lvl7pPr>
+      <a:lvl8pPr marL="3200400" algn="l" defTabSz="914400" rtl="0" eaLnBrk="1" latinLnBrk="0" hangingPunct="1">
+        <a:defRPr sz="1800" kern="1200">
+          <a:solidFill>
+            <a:schemeClr val="tx1"/>
+          </a:solidFill>
+          <a:latin typeface="+mn-lt"/>
+          <a:ea typeface="+mn-ea"/>
+          <a:cs typeface="+mn-cs"/>
+        </a:defRPr>
+      </a:lvl8pPr>
+      <a:lvl9pPr marL="3657600" algn="l" defTabSz="914400" rtl="0" eaLnBrk="1" latinLnBrk="0" hangingPunct="1">
+        <a:defRPr sz="1800" kern="1200">
+          <a:solidFill>
+            <a:schemeClr val="tx1"/>
+          </a:solidFill>
+          <a:latin typeface="+mn-lt"/>
+          <a:ea typeface="+mn-ea"/>
+          <a:cs typeface="+mn-cs"/>
+        </a:defRPr>
+      </a:lvl9pPr>
+    </p:otherStyle>
+  </p:txStyles>
+</p:sldMaster>
+</file>
+
 <file path=ppt/slides/slide1.xml><?xml version="1.0" encoding="utf-8"?>
 <p:sld xmlns:a="http://schemas.openxmlformats.org/drawingml/2006/main" xmlns:r="http://schemas.openxmlformats.org/officeDocument/2006/relationships" xmlns:p="http://schemas.openxmlformats.org/presentationml/2006/main">
-  <p:cSld name="Slide 1">
+  <p:cSld>
     <p:bg>
       <p:bgPr>
         <a:solidFill>
-          <a:srgbClr val="F7FAFC"/>
+          <a:srgbClr val="0B1220"/>
         </a:solidFill>
         <a:effectLst/>
       </p:bgPr>
@@ -1796,8 +2383,132 @@
         </p:nvSpPr>
         <p:spPr>
           <a:xfrm>
-            <a:off x="548640" y="301752"/>
-            <a:ext cx="4389120" cy="201168"/>
+            <a:off x="685800" y="1097280"/>
+            <a:ext cx="5852160" cy="1234440"/>
+          </a:xfrm>
+          <a:prstGeom prst="rect">
+            <a:avLst/>
+          </a:prstGeom>
+          <a:noFill/>
+          <a:ln/>
+        </p:spPr>
+        <p:txBody>
+          <a:bodyPr wrap="square" lIns="0" tIns="0" rIns="0" bIns="0" rtlCol="0" anchor="ctr">
+            <a:normAutofit lnSpcReduction="10000"/>
+          </a:bodyPr>
+          <a:lstStyle/>
+          <a:p>
+            <a:pPr marL="0" marR="0" lvl="0" indent="0" algn="l" defTabSz="914400" rtl="0" eaLnBrk="1" fontAlgn="auto" latinLnBrk="0" hangingPunct="1">
+              <a:lnSpc>
+                <a:spcPct val="100000"/>
+              </a:lnSpc>
+              <a:spcBef>
+                <a:spcPts val="0"/>
+              </a:spcBef>
+              <a:spcAft>
+                <a:spcPts val="0"/>
+              </a:spcAft>
+              <a:buClrTx/>
+              <a:buSzTx/>
+              <a:buFontTx/>
+              <a:buNone/>
+              <a:tabLst/>
+              <a:defRPr/>
+            </a:pPr>
+            <a:r>
+              <a:rPr kumimoji="0" lang="en-US" sz="4300" b="1" i="0" u="none" strike="noStrike" kern="1200" cap="none" spc="0" normalizeH="0" baseline="0" noProof="0" dirty="0">
+                <a:ln>
+                  <a:noFill/>
+                </a:ln>
+                <a:solidFill>
+                  <a:srgbClr val="FFFFFF"/>
+                </a:solidFill>
+                <a:effectLst/>
+                <a:uLnTx/>
+                <a:uFillTx/>
+                <a:latin typeface="Aptos Display" pitchFamily="34" charset="0"/>
+                <a:ea typeface="Aptos Display" pitchFamily="34" charset="-122"/>
+                <a:cs typeface="Aptos Display" pitchFamily="34" charset="-120"/>
+              </a:rPr>
+              <a:t>Handling Execution</a:t>
+            </a:r>
+            <a:endParaRPr kumimoji="0" lang="en-US" sz="4300" b="0" i="0" u="none" strike="noStrike" kern="1200" cap="none" spc="0" normalizeH="0" baseline="0" noProof="0" dirty="0">
+              <a:ln>
+                <a:noFill/>
+              </a:ln>
+              <a:solidFill>
+                <a:prstClr val="black"/>
+              </a:solidFill>
+              <a:effectLst/>
+              <a:uLnTx/>
+              <a:uFillTx/>
+              <a:latin typeface="Aptos"/>
+              <a:ea typeface="+mn-ea"/>
+              <a:cs typeface="+mn-cs"/>
+            </a:endParaRPr>
+          </a:p>
+          <a:p>
+            <a:pPr marL="0" marR="0" lvl="0" indent="0" algn="l" defTabSz="914400" rtl="0" eaLnBrk="1" fontAlgn="auto" latinLnBrk="0" hangingPunct="1">
+              <a:lnSpc>
+                <a:spcPct val="100000"/>
+              </a:lnSpc>
+              <a:spcBef>
+                <a:spcPts val="0"/>
+              </a:spcBef>
+              <a:spcAft>
+                <a:spcPts val="0"/>
+              </a:spcAft>
+              <a:buClrTx/>
+              <a:buSzTx/>
+              <a:buFontTx/>
+              <a:buNone/>
+              <a:tabLst/>
+              <a:defRPr/>
+            </a:pPr>
+            <a:r>
+              <a:rPr kumimoji="0" lang="en-US" sz="4300" b="1" i="0" u="none" strike="noStrike" kern="1200" cap="none" spc="0" normalizeH="0" baseline="0" noProof="0" dirty="0">
+                <a:ln>
+                  <a:noFill/>
+                </a:ln>
+                <a:solidFill>
+                  <a:srgbClr val="FFFFFF"/>
+                </a:solidFill>
+                <a:effectLst/>
+                <a:uLnTx/>
+                <a:uFillTx/>
+                <a:latin typeface="Aptos Display" pitchFamily="34" charset="0"/>
+                <a:ea typeface="Aptos Display" pitchFamily="34" charset="-122"/>
+                <a:cs typeface="Aptos Display" pitchFamily="34" charset="-120"/>
+              </a:rPr>
+              <a:t>Overruns</a:t>
+            </a:r>
+            <a:endParaRPr kumimoji="0" lang="en-US" sz="4300" b="0" i="0" u="none" strike="noStrike" kern="1200" cap="none" spc="0" normalizeH="0" baseline="0" noProof="0" dirty="0">
+              <a:ln>
+                <a:noFill/>
+              </a:ln>
+              <a:solidFill>
+                <a:prstClr val="black"/>
+              </a:solidFill>
+              <a:effectLst/>
+              <a:uLnTx/>
+              <a:uFillTx/>
+              <a:latin typeface="Aptos"/>
+              <a:ea typeface="+mn-ea"/>
+              <a:cs typeface="+mn-cs"/>
+            </a:endParaRPr>
+          </a:p>
+        </p:txBody>
+      </p:sp>
+      <p:sp>
+        <p:nvSpPr>
+          <p:cNvPr id="3" name="Text 1"/>
+          <p:cNvSpPr/>
+          <p:nvPr/>
+        </p:nvSpPr>
+        <p:spPr>
+          <a:xfrm>
+            <a:off x="731520" y="2560320"/>
+            <a:ext cx="7132320" cy="320040"/>
           </a:xfrm>
           <a:prstGeom prst="rect">
             <a:avLst/>
@@ -1809,31 +2520,67 @@
           <a:bodyPr wrap="square" lIns="0" tIns="0" rIns="0" bIns="0" rtlCol="0" anchor="ctr"/>
           <a:lstStyle/>
           <a:p>
-            <a:pPr marL="0" indent="0">
-              <a:buNone/>
-            </a:pPr>
-            <a:r>
-              <a:rPr lang="en-US" sz="900" b="1" dirty="0">
-                <a:solidFill>
-                  <a:srgbClr val="0E7490"/>
-                </a:solidFill>
-              </a:rPr>
-              <a:t>SEMINAR • Handling Execution Overruns</a:t>
-            </a:r>
-            <a:endParaRPr lang="en-US" sz="900" dirty="0"/>
-          </a:p>
-        </p:txBody>
-      </p:sp>
-      <p:sp>
-        <p:nvSpPr>
-          <p:cNvPr id="3" name="Text 1"/>
-          <p:cNvSpPr/>
-          <p:nvPr/>
-        </p:nvSpPr>
-        <p:spPr>
-          <a:xfrm>
-            <a:off x="594360" y="1051560"/>
-            <a:ext cx="5669280" cy="1417320"/>
+            <a:pPr marL="0" marR="0" lvl="0" indent="0" algn="l" defTabSz="914400" rtl="0" eaLnBrk="1" fontAlgn="auto" latinLnBrk="0" hangingPunct="1">
+              <a:lnSpc>
+                <a:spcPct val="100000"/>
+              </a:lnSpc>
+              <a:spcBef>
+                <a:spcPts val="0"/>
+              </a:spcBef>
+              <a:spcAft>
+                <a:spcPts val="0"/>
+              </a:spcAft>
+              <a:buClrTx/>
+              <a:buSzTx/>
+              <a:buFontTx/>
+              <a:buNone/>
+              <a:tabLst/>
+              <a:defRPr/>
+            </a:pPr>
+            <a:r>
+              <a:rPr kumimoji="0" lang="en-US" sz="1700" b="0" i="0" u="none" strike="noStrike" kern="1200" cap="none" spc="0" normalizeH="0" baseline="0" noProof="0" dirty="0">
+                <a:ln>
+                  <a:noFill/>
+                </a:ln>
+                <a:solidFill>
+                  <a:srgbClr val="D7E4F5"/>
+                </a:solidFill>
+                <a:effectLst/>
+                <a:uLnTx/>
+                <a:uFillTx/>
+                <a:latin typeface="Aptos" pitchFamily="34" charset="0"/>
+                <a:ea typeface="Aptos" pitchFamily="34" charset="-122"/>
+                <a:cs typeface="Aptos" pitchFamily="34" charset="-120"/>
+              </a:rPr>
+              <a:t>Hard real-time control systems • CBS/CBShd • Prototype simulation</a:t>
+            </a:r>
+            <a:endParaRPr kumimoji="0" lang="en-US" sz="1700" b="0" i="0" u="none" strike="noStrike" kern="1200" cap="none" spc="0" normalizeH="0" baseline="0" noProof="0" dirty="0">
+              <a:ln>
+                <a:noFill/>
+              </a:ln>
+              <a:solidFill>
+                <a:prstClr val="black"/>
+              </a:solidFill>
+              <a:effectLst/>
+              <a:uLnTx/>
+              <a:uFillTx/>
+              <a:latin typeface="Aptos"/>
+              <a:ea typeface="+mn-ea"/>
+              <a:cs typeface="+mn-cs"/>
+            </a:endParaRPr>
+          </a:p>
+        </p:txBody>
+      </p:sp>
+      <p:sp>
+        <p:nvSpPr>
+          <p:cNvPr id="4" name="Text 2"/>
+          <p:cNvSpPr/>
+          <p:nvPr/>
+        </p:nvSpPr>
+        <p:spPr>
+          <a:xfrm>
+            <a:off x="731520" y="5166360"/>
+            <a:ext cx="7132320" cy="502920"/>
           </a:xfrm>
           <a:prstGeom prst="rect">
             <a:avLst/>
@@ -1845,68 +2592,104 @@
           <a:bodyPr wrap="square" lIns="0" tIns="0" rIns="0" bIns="0" rtlCol="0" anchor="ctr"/>
           <a:lstStyle/>
           <a:p>
-            <a:pPr marL="0" indent="0">
-              <a:buNone/>
-            </a:pPr>
-            <a:r>
-              <a:rPr lang="en-US" sz="4000" b="1" dirty="0">
-                <a:solidFill>
-                  <a:srgbClr val="112B3C"/>
-                </a:solidFill>
-              </a:rPr>
-              <a:t>Handling Execution</a:t>
-            </a:r>
-            <a:endParaRPr lang="en-US" sz="4000" dirty="0"/>
-          </a:p>
-          <a:p>
-            <a:pPr marL="0" indent="0">
-              <a:buNone/>
-            </a:pPr>
-            <a:r>
-              <a:rPr lang="en-US" sz="4000" b="1" dirty="0">
-                <a:solidFill>
-                  <a:srgbClr val="112B3C"/>
-                </a:solidFill>
-              </a:rPr>
-              <a:t>Overruns</a:t>
-            </a:r>
-            <a:endParaRPr lang="en-US" sz="4000" dirty="0"/>
-          </a:p>
-        </p:txBody>
-      </p:sp>
-      <p:sp>
-        <p:nvSpPr>
-          <p:cNvPr id="4" name="Text 2"/>
-          <p:cNvSpPr/>
-          <p:nvPr/>
-        </p:nvSpPr>
-        <p:spPr>
-          <a:xfrm>
-            <a:off x="621792" y="2651760"/>
-            <a:ext cx="5852160" cy="457200"/>
-          </a:xfrm>
-          <a:prstGeom prst="rect">
-            <a:avLst/>
-          </a:prstGeom>
-          <a:noFill/>
-          <a:ln/>
-        </p:spPr>
-        <p:txBody>
-          <a:bodyPr wrap="square" lIns="0" tIns="0" rIns="0" bIns="0" rtlCol="0" anchor="ctr"/>
-          <a:lstStyle/>
-          <a:p>
-            <a:pPr marL="0" indent="0">
-              <a:buNone/>
-            </a:pPr>
-            <a:r>
-              <a:rPr lang="en-US" sz="1800" dirty="0">
-                <a:solidFill>
-                  <a:srgbClr val="536878"/>
-                </a:solidFill>
-              </a:rPr>
-              <a:t>Concepts, CBS/CBShd intuition, and a small image-processing simulation</a:t>
-            </a:r>
-            <a:endParaRPr lang="en-US" sz="1800" dirty="0"/>
+            <a:pPr marL="0" marR="0" lvl="0" indent="0" algn="l" defTabSz="914400" rtl="0" eaLnBrk="1" fontAlgn="auto" latinLnBrk="0" hangingPunct="1">
+              <a:lnSpc>
+                <a:spcPct val="100000"/>
+              </a:lnSpc>
+              <a:spcBef>
+                <a:spcPts val="0"/>
+              </a:spcBef>
+              <a:spcAft>
+                <a:spcPts val="0"/>
+              </a:spcAft>
+              <a:buClrTx/>
+              <a:buSzTx/>
+              <a:buFontTx/>
+              <a:buNone/>
+              <a:tabLst/>
+              <a:defRPr/>
+            </a:pPr>
+            <a:r>
+              <a:rPr kumimoji="0" lang="en-US" sz="1300" b="0" i="0" u="none" strike="noStrike" kern="1200" cap="none" spc="0" normalizeH="0" baseline="0" noProof="0" dirty="0">
+                <a:ln>
+                  <a:noFill/>
+                </a:ln>
+                <a:solidFill>
+                  <a:srgbClr val="B8C7DA"/>
+                </a:solidFill>
+                <a:effectLst/>
+                <a:uLnTx/>
+                <a:uFillTx/>
+                <a:latin typeface="Aptos" pitchFamily="34" charset="0"/>
+                <a:ea typeface="Aptos" pitchFamily="34" charset="-122"/>
+                <a:cs typeface="Aptos" pitchFamily="34" charset="-120"/>
+              </a:rPr>
+              <a:t>Christian Percival</a:t>
+            </a:r>
+            <a:endParaRPr kumimoji="0" lang="en-US" sz="1300" b="0" i="0" u="none" strike="noStrike" kern="1200" cap="none" spc="0" normalizeH="0" baseline="0" noProof="0" dirty="0">
+              <a:ln>
+                <a:noFill/>
+              </a:ln>
+              <a:solidFill>
+                <a:prstClr val="black"/>
+              </a:solidFill>
+              <a:effectLst/>
+              <a:uLnTx/>
+              <a:uFillTx/>
+              <a:latin typeface="Aptos"/>
+              <a:ea typeface="+mn-ea"/>
+              <a:cs typeface="+mn-cs"/>
+            </a:endParaRPr>
+          </a:p>
+          <a:p>
+            <a:pPr marL="0" marR="0" lvl="0" indent="0" algn="l" defTabSz="914400" rtl="0" eaLnBrk="1" fontAlgn="auto" latinLnBrk="0" hangingPunct="1">
+              <a:lnSpc>
+                <a:spcPct val="100000"/>
+              </a:lnSpc>
+              <a:spcBef>
+                <a:spcPts val="0"/>
+              </a:spcBef>
+              <a:spcAft>
+                <a:spcPts val="0"/>
+              </a:spcAft>
+              <a:buClrTx/>
+              <a:buSzTx/>
+              <a:buFontTx/>
+              <a:buNone/>
+              <a:tabLst/>
+              <a:defRPr/>
+            </a:pPr>
+            <a:r>
+              <a:rPr kumimoji="0" lang="en-US" sz="1300" b="0" i="0" u="none" strike="noStrike" kern="1200" cap="none" spc="0" normalizeH="0" baseline="0" noProof="0" dirty="0">
+                <a:ln>
+                  <a:noFill/>
+                </a:ln>
+                <a:solidFill>
+                  <a:srgbClr val="B8C7DA"/>
+                </a:solidFill>
+                <a:effectLst/>
+                <a:uLnTx/>
+                <a:uFillTx/>
+                <a:latin typeface="Aptos" pitchFamily="34" charset="0"/>
+                <a:ea typeface="Aptos" pitchFamily="34" charset="-122"/>
+                <a:cs typeface="Aptos" pitchFamily="34" charset="-120"/>
+              </a:rPr>
+              <a:t>Electronic Engineering • Hochschule Hamm-Lippstadt</a:t>
+            </a:r>
+            <a:endParaRPr kumimoji="0" lang="en-US" sz="1300" b="0" i="0" u="none" strike="noStrike" kern="1200" cap="none" spc="0" normalizeH="0" baseline="0" noProof="0" dirty="0">
+              <a:ln>
+                <a:noFill/>
+              </a:ln>
+              <a:solidFill>
+                <a:prstClr val="black"/>
+              </a:solidFill>
+              <a:effectLst/>
+              <a:uLnTx/>
+              <a:uFillTx/>
+              <a:latin typeface="Aptos"/>
+              <a:ea typeface="+mn-ea"/>
+              <a:cs typeface="+mn-cs"/>
+            </a:endParaRPr>
           </a:p>
         </p:txBody>
       </p:sp>
@@ -1918,20 +2701,16 @@
         </p:nvSpPr>
         <p:spPr>
           <a:xfrm>
-            <a:off x="621792" y="3310128"/>
-            <a:ext cx="1828800" cy="320040"/>
-          </a:xfrm>
-          <a:prstGeom prst="roundRect">
-            <a:avLst>
-              <a:gd name="adj" fmla="val 14286"/>
-            </a:avLst>
-          </a:prstGeom>
-          <a:solidFill>
-            <a:srgbClr val="0E7490"/>
-          </a:solidFill>
-          <a:ln w="12700">
+            <a:off x="731520" y="3182112"/>
+            <a:ext cx="5577840" cy="0"/>
+          </a:xfrm>
+          <a:prstGeom prst="line">
+            <a:avLst/>
+          </a:prstGeom>
+          <a:noFill/>
+          <a:ln w="25400">
             <a:solidFill>
-              <a:srgbClr val="0E7490"/>
+              <a:srgbClr val="22C8F2"/>
             </a:solidFill>
             <a:prstDash val="solid"/>
           </a:ln>
@@ -1940,7 +2719,37 @@
           <a:bodyPr/>
           <a:lstStyle/>
           <a:p>
-            <a:endParaRPr lang="en-GB"/>
+            <a:pPr marL="0" marR="0" lvl="0" indent="0" algn="l" defTabSz="914400" rtl="0" eaLnBrk="1" fontAlgn="auto" latinLnBrk="0" hangingPunct="1">
+              <a:lnSpc>
+                <a:spcPct val="100000"/>
+              </a:lnSpc>
+              <a:spcBef>
+                <a:spcPts val="0"/>
+              </a:spcBef>
+              <a:spcAft>
+                <a:spcPts val="0"/>
+              </a:spcAft>
+              <a:buClrTx/>
+              <a:buSzTx/>
+              <a:buFontTx/>
+              <a:buNone/>
+              <a:tabLst/>
+              <a:defRPr/>
+            </a:pPr>
+            <a:endParaRPr kumimoji="0" lang="en-GB" sz="1800" b="0" i="0" u="none" strike="noStrike" kern="1200" cap="none" spc="0" normalizeH="0" baseline="0" noProof="0">
+              <a:ln>
+                <a:noFill/>
+              </a:ln>
+              <a:solidFill>
+                <a:prstClr val="black"/>
+              </a:solidFill>
+              <a:effectLst/>
+              <a:uLnTx/>
+              <a:uFillTx/>
+              <a:latin typeface="Aptos"/>
+              <a:ea typeface="+mn-ea"/>
+              <a:cs typeface="+mn-cs"/>
+            </a:endParaRPr>
           </a:p>
         </p:txBody>
       </p:sp>
@@ -1952,8 +2761,8 @@
         </p:nvSpPr>
         <p:spPr>
           <a:xfrm>
-            <a:off x="694944" y="3383280"/>
-            <a:ext cx="1682496" cy="164592"/>
+            <a:off x="8183880" y="2029968"/>
+            <a:ext cx="3291840" cy="228600"/>
           </a:xfrm>
           <a:prstGeom prst="rect">
             <a:avLst/>
@@ -1965,348 +2774,128 @@
           <a:bodyPr wrap="square" lIns="0" tIns="0" rIns="0" bIns="0" rtlCol="0" anchor="ctr"/>
           <a:lstStyle/>
           <a:p>
-            <a:pPr marL="0" indent="0" algn="ctr">
-              <a:buNone/>
-            </a:pPr>
-            <a:endParaRPr lang="en-US" sz="900" dirty="0"/>
-          </a:p>
-        </p:txBody>
-      </p:sp>
-      <p:sp>
-        <p:nvSpPr>
-          <p:cNvPr id="7" name="Shape 5"/>
-          <p:cNvSpPr/>
-          <p:nvPr/>
-        </p:nvSpPr>
-        <p:spPr>
-          <a:xfrm>
-            <a:off x="2651760" y="3310128"/>
-            <a:ext cx="1783080" cy="320040"/>
-          </a:xfrm>
-          <a:prstGeom prst="roundRect">
-            <a:avLst>
-              <a:gd name="adj" fmla="val 14286"/>
-            </a:avLst>
-          </a:prstGeom>
-          <a:solidFill>
-            <a:srgbClr val="F97316"/>
-          </a:solidFill>
-          <a:ln w="12700">
-            <a:solidFill>
-              <a:srgbClr val="F97316"/>
-            </a:solidFill>
-            <a:prstDash val="solid"/>
-          </a:ln>
-        </p:spPr>
-        <p:txBody>
-          <a:bodyPr/>
-          <a:lstStyle/>
-          <a:p>
-            <a:endParaRPr lang="en-GB"/>
-          </a:p>
-        </p:txBody>
-      </p:sp>
-      <p:sp>
-        <p:nvSpPr>
-          <p:cNvPr id="8" name="Text 6"/>
-          <p:cNvSpPr/>
-          <p:nvPr/>
-        </p:nvSpPr>
-        <p:spPr>
-          <a:xfrm>
-            <a:off x="2724912" y="3383280"/>
-            <a:ext cx="1636776" cy="164592"/>
-          </a:xfrm>
-          <a:prstGeom prst="rect">
-            <a:avLst/>
-          </a:prstGeom>
-          <a:noFill/>
-          <a:ln/>
-        </p:spPr>
-        <p:txBody>
-          <a:bodyPr wrap="square" lIns="0" tIns="0" rIns="0" bIns="0" rtlCol="0" anchor="ctr"/>
-          <a:lstStyle/>
-          <a:p>
-            <a:pPr marL="0" indent="0" algn="ctr">
-              <a:buNone/>
-            </a:pPr>
-            <a:endParaRPr lang="en-US" sz="900" dirty="0"/>
-          </a:p>
-        </p:txBody>
-      </p:sp>
-      <p:sp>
-        <p:nvSpPr>
-          <p:cNvPr id="9" name="Shape 7"/>
-          <p:cNvSpPr/>
-          <p:nvPr/>
-        </p:nvSpPr>
-        <p:spPr>
-          <a:xfrm>
-            <a:off x="6720840" y="2057400"/>
-            <a:ext cx="914400" cy="640080"/>
-          </a:xfrm>
-          <a:prstGeom prst="chevron">
-            <a:avLst/>
-          </a:prstGeom>
-          <a:solidFill>
-            <a:srgbClr val="0E7490"/>
-          </a:solidFill>
-          <a:ln w="12700">
-            <a:solidFill>
-              <a:srgbClr val="0E7490"/>
-            </a:solidFill>
-            <a:prstDash val="solid"/>
-          </a:ln>
-        </p:spPr>
-        <p:txBody>
-          <a:bodyPr/>
-          <a:lstStyle/>
-          <a:p>
-            <a:endParaRPr lang="en-GB"/>
-          </a:p>
-        </p:txBody>
-      </p:sp>
-      <p:sp>
-        <p:nvSpPr>
-          <p:cNvPr id="10" name="Shape 8"/>
-          <p:cNvSpPr/>
-          <p:nvPr/>
-        </p:nvSpPr>
-        <p:spPr>
-          <a:xfrm>
-            <a:off x="8092440" y="2057400"/>
-            <a:ext cx="914400" cy="640080"/>
-          </a:xfrm>
-          <a:prstGeom prst="chevron">
-            <a:avLst/>
-          </a:prstGeom>
-          <a:solidFill>
-            <a:srgbClr val="F97316"/>
-          </a:solidFill>
-          <a:ln w="12700">
-            <a:solidFill>
-              <a:srgbClr val="F97316"/>
-            </a:solidFill>
-            <a:prstDash val="solid"/>
-          </a:ln>
-        </p:spPr>
-        <p:txBody>
-          <a:bodyPr/>
-          <a:lstStyle/>
-          <a:p>
-            <a:endParaRPr lang="en-GB"/>
-          </a:p>
-        </p:txBody>
-      </p:sp>
-      <p:sp>
-        <p:nvSpPr>
-          <p:cNvPr id="11" name="Shape 9"/>
-          <p:cNvSpPr/>
-          <p:nvPr/>
-        </p:nvSpPr>
-        <p:spPr>
-          <a:xfrm>
-            <a:off x="9464040" y="2057400"/>
-            <a:ext cx="914400" cy="640080"/>
-          </a:xfrm>
-          <a:prstGeom prst="chevron">
-            <a:avLst/>
-          </a:prstGeom>
-          <a:solidFill>
-            <a:srgbClr val="16A34A"/>
-          </a:solidFill>
-          <a:ln w="12700">
-            <a:solidFill>
-              <a:srgbClr val="16A34A"/>
-            </a:solidFill>
-            <a:prstDash val="solid"/>
-          </a:ln>
-        </p:spPr>
-        <p:txBody>
-          <a:bodyPr/>
-          <a:lstStyle/>
-          <a:p>
-            <a:endParaRPr lang="en-GB"/>
-          </a:p>
-        </p:txBody>
-      </p:sp>
-      <p:sp>
-        <p:nvSpPr>
-          <p:cNvPr id="12" name="Text 10"/>
-          <p:cNvSpPr/>
-          <p:nvPr/>
-        </p:nvSpPr>
-        <p:spPr>
-          <a:xfrm>
-            <a:off x="6446520" y="3429000"/>
-            <a:ext cx="1280160" cy="274320"/>
-          </a:xfrm>
-          <a:prstGeom prst="rect">
-            <a:avLst/>
-          </a:prstGeom>
-          <a:noFill/>
-          <a:ln/>
-        </p:spPr>
-        <p:txBody>
-          <a:bodyPr wrap="square" lIns="0" tIns="0" rIns="0" bIns="0" rtlCol="0" anchor="ctr"/>
-          <a:lstStyle/>
-          <a:p>
-            <a:pPr marL="0" indent="0" algn="ctr">
-              <a:buNone/>
-            </a:pPr>
-            <a:r>
-              <a:rPr lang="en-US" sz="1200" dirty="0">
-                <a:solidFill>
-                  <a:srgbClr val="112B3C"/>
-                </a:solidFill>
-              </a:rPr>
-              <a:t>Normal task</a:t>
-            </a:r>
-            <a:endParaRPr lang="en-US" sz="1200" dirty="0"/>
-          </a:p>
-        </p:txBody>
-      </p:sp>
-      <p:sp>
-        <p:nvSpPr>
-          <p:cNvPr id="13" name="Text 11"/>
-          <p:cNvSpPr/>
-          <p:nvPr/>
-        </p:nvSpPr>
-        <p:spPr>
-          <a:xfrm>
-            <a:off x="7909560" y="3429000"/>
-            <a:ext cx="1143000" cy="274320"/>
-          </a:xfrm>
-          <a:prstGeom prst="rect">
-            <a:avLst/>
-          </a:prstGeom>
-          <a:noFill/>
-          <a:ln/>
-        </p:spPr>
-        <p:txBody>
-          <a:bodyPr wrap="square" lIns="0" tIns="0" rIns="0" bIns="0" rtlCol="0" anchor="ctr"/>
-          <a:lstStyle/>
-          <a:p>
-            <a:pPr marL="0" indent="0" algn="ctr">
-              <a:buNone/>
-            </a:pPr>
-            <a:r>
-              <a:rPr lang="en-US" sz="1200" dirty="0">
-                <a:solidFill>
-                  <a:srgbClr val="112B3C"/>
-                </a:solidFill>
-              </a:rPr>
-              <a:t>Overrun</a:t>
-            </a:r>
-            <a:endParaRPr lang="en-US" sz="1200" dirty="0"/>
-          </a:p>
-        </p:txBody>
-      </p:sp>
-      <p:sp>
-        <p:nvSpPr>
-          <p:cNvPr id="14" name="Text 12"/>
-          <p:cNvSpPr/>
-          <p:nvPr/>
-        </p:nvSpPr>
-        <p:spPr>
-          <a:xfrm>
-            <a:off x="9281160" y="3429000"/>
-            <a:ext cx="1234440" cy="274320"/>
-          </a:xfrm>
-          <a:prstGeom prst="rect">
-            <a:avLst/>
-          </a:prstGeom>
-          <a:noFill/>
-          <a:ln/>
-        </p:spPr>
-        <p:txBody>
-          <a:bodyPr wrap="square" lIns="0" tIns="0" rIns="0" bIns="0" rtlCol="0" anchor="ctr"/>
-          <a:lstStyle/>
-          <a:p>
-            <a:pPr marL="0" indent="0" algn="ctr">
-              <a:buNone/>
-            </a:pPr>
-            <a:r>
-              <a:rPr lang="en-US" sz="1200" dirty="0">
-                <a:solidFill>
-                  <a:srgbClr val="112B3C"/>
-                </a:solidFill>
-              </a:rPr>
-              <a:t>Handled</a:t>
-            </a:r>
-            <a:endParaRPr lang="en-US" sz="1200" dirty="0"/>
-          </a:p>
-        </p:txBody>
-      </p:sp>
-      <p:sp>
-        <p:nvSpPr>
-          <p:cNvPr id="15" name="Text 13"/>
-          <p:cNvSpPr/>
-          <p:nvPr/>
-        </p:nvSpPr>
-        <p:spPr>
-          <a:xfrm>
-            <a:off x="621792" y="6080760"/>
-            <a:ext cx="7772400" cy="256032"/>
-          </a:xfrm>
-          <a:prstGeom prst="rect">
-            <a:avLst/>
-          </a:prstGeom>
-          <a:noFill/>
-          <a:ln/>
-        </p:spPr>
-        <p:txBody>
-          <a:bodyPr wrap="square" lIns="0" tIns="0" rIns="0" bIns="0" rtlCol="0" anchor="ctr"/>
-          <a:lstStyle/>
-          <a:p>
-            <a:pPr marL="0" indent="0">
-              <a:buNone/>
-            </a:pPr>
-            <a:r>
-              <a:rPr lang="en-US" sz="1200" dirty="0">
-                <a:solidFill>
-                  <a:srgbClr val="536878"/>
-                </a:solidFill>
-              </a:rPr>
-              <a:t>Christian Percival • Hochschule Hamm-Lippstadt</a:t>
-            </a:r>
-            <a:endParaRPr lang="en-US" sz="1200" dirty="0"/>
-          </a:p>
-        </p:txBody>
-      </p:sp>
-      <p:sp>
-        <p:nvSpPr>
-          <p:cNvPr id="16" name="Text 14"/>
-          <p:cNvSpPr/>
-          <p:nvPr/>
-        </p:nvSpPr>
-        <p:spPr>
-          <a:xfrm>
-            <a:off x="502920" y="6446520"/>
-            <a:ext cx="8686800" cy="164592"/>
-          </a:xfrm>
-          <a:prstGeom prst="rect">
-            <a:avLst/>
-          </a:prstGeom>
-          <a:noFill/>
-          <a:ln/>
-        </p:spPr>
-        <p:txBody>
-          <a:bodyPr wrap="square" lIns="0" tIns="0" rIns="0" bIns="0" rtlCol="0" anchor="ctr"/>
-          <a:lstStyle/>
-          <a:p>
-            <a:pPr marL="0" indent="0">
-              <a:buNone/>
-            </a:pPr>
-            <a:r>
-              <a:rPr lang="en-US" sz="800" dirty="0">
+            <a:pPr marL="0" marR="0" lvl="0" indent="0" algn="l" defTabSz="914400" rtl="0" eaLnBrk="1" fontAlgn="auto" latinLnBrk="0" hangingPunct="1">
+              <a:lnSpc>
+                <a:spcPct val="100000"/>
+              </a:lnSpc>
+              <a:spcBef>
+                <a:spcPts val="0"/>
+              </a:spcBef>
+              <a:spcAft>
+                <a:spcPts val="0"/>
+              </a:spcAft>
+              <a:buClrTx/>
+              <a:buSzTx/>
+              <a:buFontTx/>
+              <a:buNone/>
+              <a:tabLst/>
+              <a:defRPr/>
+            </a:pPr>
+            <a:r>
+              <a:rPr kumimoji="0" lang="en-US" sz="1100" b="1" i="0" u="none" strike="noStrike" kern="1200" cap="none" spc="0" normalizeH="0" baseline="0" noProof="0" dirty="0">
+                <a:ln>
+                  <a:noFill/>
+                </a:ln>
+                <a:solidFill>
+                  <a:srgbClr val="22C8F2"/>
+                </a:solidFill>
+                <a:effectLst/>
+                <a:uLnTx/>
+                <a:uFillTx/>
+                <a:latin typeface="Aptos" pitchFamily="34" charset="0"/>
+                <a:ea typeface="Aptos" pitchFamily="34" charset="-122"/>
+                <a:cs typeface="Aptos" pitchFamily="34" charset="-120"/>
+              </a:rPr>
+              <a:t>Core question</a:t>
+            </a:r>
+            <a:endParaRPr kumimoji="0" lang="en-US" sz="1100" b="0" i="0" u="none" strike="noStrike" kern="1200" cap="none" spc="0" normalizeH="0" baseline="0" noProof="0" dirty="0">
+              <a:ln>
+                <a:noFill/>
+              </a:ln>
+              <a:solidFill>
+                <a:prstClr val="black"/>
+              </a:solidFill>
+              <a:effectLst/>
+              <a:uLnTx/>
+              <a:uFillTx/>
+              <a:latin typeface="Aptos"/>
+              <a:ea typeface="+mn-ea"/>
+              <a:cs typeface="+mn-cs"/>
+            </a:endParaRPr>
+          </a:p>
+        </p:txBody>
+      </p:sp>
+      <p:sp>
+        <p:nvSpPr>
+          <p:cNvPr id="7" name="Text 5"/>
+          <p:cNvSpPr/>
+          <p:nvPr/>
+        </p:nvSpPr>
+        <p:spPr>
+          <a:xfrm>
+            <a:off x="8183880" y="2377440"/>
+            <a:ext cx="2880360" cy="1188720"/>
+          </a:xfrm>
+          <a:prstGeom prst="rect">
+            <a:avLst/>
+          </a:prstGeom>
+          <a:noFill/>
+          <a:ln/>
+        </p:spPr>
+        <p:txBody>
+          <a:bodyPr wrap="square" lIns="0" tIns="0" rIns="0" bIns="0" rtlCol="0" anchor="ctr">
+            <a:normAutofit fontScale="92500" lnSpcReduction="20000"/>
+          </a:bodyPr>
+          <a:lstStyle/>
+          <a:p>
+            <a:pPr marL="0" marR="0" lvl="0" indent="0" algn="l" defTabSz="914400" rtl="0" eaLnBrk="1" fontAlgn="auto" latinLnBrk="0" hangingPunct="1">
+              <a:lnSpc>
+                <a:spcPct val="100000"/>
+              </a:lnSpc>
+              <a:spcBef>
+                <a:spcPts val="0"/>
+              </a:spcBef>
+              <a:spcAft>
+                <a:spcPts val="0"/>
+              </a:spcAft>
+              <a:buClrTx/>
+              <a:buSzTx/>
+              <a:buFontTx/>
+              <a:buNone/>
+              <a:tabLst/>
+              <a:defRPr/>
+            </a:pPr>
+            <a:r>
+              <a:rPr kumimoji="0" lang="en-US" sz="1900" b="1" i="0" u="none" strike="noStrike" kern="1200" cap="none" spc="0" normalizeH="0" baseline="0" noProof="0" dirty="0">
+                <a:ln>
+                  <a:noFill/>
+                </a:ln>
                 <a:solidFill>
                   <a:srgbClr val="FFFFFF"/>
                 </a:solidFill>
-              </a:rPr>
-              <a:t>Main message: WCET is safe but pessimistic; controlled overrun handling keeps better normal-case performance.</a:t>
-            </a:r>
-            <a:endParaRPr lang="en-US" sz="800" dirty="0"/>
+                <a:effectLst/>
+                <a:uLnTx/>
+                <a:uFillTx/>
+                <a:latin typeface="Aptos Display" pitchFamily="34" charset="0"/>
+                <a:ea typeface="Aptos Display" pitchFamily="34" charset="-122"/>
+                <a:cs typeface="Aptos Display" pitchFamily="34" charset="-120"/>
+              </a:rPr>
+              <a:t>How can a hard real-time system stay safe when a task suddenly needs more execution time than expected?</a:t>
+            </a:r>
+            <a:endParaRPr kumimoji="0" lang="en-US" sz="1900" b="0" i="0" u="none" strike="noStrike" kern="1200" cap="none" spc="0" normalizeH="0" baseline="0" noProof="0" dirty="0">
+              <a:ln>
+                <a:noFill/>
+              </a:ln>
+              <a:solidFill>
+                <a:prstClr val="black"/>
+              </a:solidFill>
+              <a:effectLst/>
+              <a:uLnTx/>
+              <a:uFillTx/>
+              <a:latin typeface="Aptos"/>
+              <a:ea typeface="+mn-ea"/>
+              <a:cs typeface="+mn-cs"/>
+            </a:endParaRPr>
           </a:p>
         </p:txBody>
       </p:sp>
@@ -2322,7 +2911,7 @@
         </p:nvSpPr>
         <p:spPr>
           <a:xfrm>
-            <a:off x="11521440" y="6446520"/>
+            <a:off x="11503152" y="6565392"/>
             <a:ext cx="800000" cy="300000"/>
           </a:xfrm>
           <a:prstGeom prst="rect">
@@ -2330,7 +2919,7 @@
           </a:prstGeom>
           <a:extLst>
             <a:ext uri="{C572A759-6A51-4108-AA02-DFA0A04FC94B}">
-              <ma14:wrappingTextBoxFlag xmlns="" xmlns:ma14="http://schemas.microsoft.com/office/mac/drawingml/2011/main" val="0"/>
+              <ma14:wrappingTextBoxFlag xmlns:ma14="http://schemas.microsoft.com/office/mac/drawingml/2011/main" xmlns="" val="0"/>
             </a:ext>
           </a:extLst>
         </p:spPr>
@@ -2340,7 +2929,7 @@
             <a:lvl1pPr>
               <a:defRPr sz="800">
                 <a:solidFill>
-                  <a:srgbClr val="FFFFFF"/>
+                  <a:srgbClr val="6D7B90"/>
                 </a:solidFill>
                 <a:latin typeface="Aptos"/>
                 <a:ea typeface="Aptos"/>
@@ -2349,12 +2938,67 @@
             </a:lvl1pPr>
           </a:lstStyle>
           <a:p>
-            <a:pPr algn="l"/>
+            <a:pPr marL="0" marR="0" lvl="0" indent="0" algn="l" defTabSz="914400" rtl="0" eaLnBrk="1" fontAlgn="auto" latinLnBrk="0" hangingPunct="1">
+              <a:lnSpc>
+                <a:spcPct val="100000"/>
+              </a:lnSpc>
+              <a:spcBef>
+                <a:spcPts val="0"/>
+              </a:spcBef>
+              <a:spcAft>
+                <a:spcPts val="0"/>
+              </a:spcAft>
+              <a:buClrTx/>
+              <a:buSzTx/>
+              <a:buFontTx/>
+              <a:buNone/>
+              <a:tabLst/>
+              <a:defRPr/>
+            </a:pPr>
             <a:fld id="{F7021451-1387-4CA6-816F-3879F97B5CBC}" type="slidenum">
-              <a:rPr lang="en-US" b="0"/>
+              <a:rPr kumimoji="0" lang="en-US" sz="800" b="0" i="0" u="none" strike="noStrike" kern="1200" cap="none" spc="0" normalizeH="0" baseline="0" noProof="0">
+                <a:ln>
+                  <a:noFill/>
+                </a:ln>
+                <a:solidFill>
+                  <a:srgbClr val="6D7B90"/>
+                </a:solidFill>
+                <a:effectLst/>
+                <a:uLnTx/>
+                <a:uFillTx/>
+                <a:latin typeface="Aptos"/>
+              </a:rPr>
+              <a:pPr marL="0" marR="0" lvl="0" indent="0" algn="l" defTabSz="914400" rtl="0" eaLnBrk="1" fontAlgn="auto" latinLnBrk="0" hangingPunct="1">
+                <a:lnSpc>
+                  <a:spcPct val="100000"/>
+                </a:lnSpc>
+                <a:spcBef>
+                  <a:spcPts val="0"/>
+                </a:spcBef>
+                <a:spcAft>
+                  <a:spcPts val="0"/>
+                </a:spcAft>
+                <a:buClrTx/>
+                <a:buSzTx/>
+                <a:buFontTx/>
+                <a:buNone/>
+                <a:tabLst/>
+                <a:defRPr/>
+              </a:pPr>
               <a:t>1</a:t>
             </a:fld>
-            <a:endParaRPr lang="en-US"/>
+            <a:endParaRPr kumimoji="0" lang="en-US" sz="800" b="0" i="0" u="none" strike="noStrike" kern="1200" cap="none" spc="0" normalizeH="0" baseline="0" noProof="0">
+              <a:ln>
+                <a:noFill/>
+              </a:ln>
+              <a:solidFill>
+                <a:srgbClr val="6D7B90"/>
+              </a:solidFill>
+              <a:effectLst/>
+              <a:uLnTx/>
+              <a:uFillTx/>
+              <a:latin typeface="Aptos"/>
+            </a:endParaRPr>
           </a:p>
         </p:txBody>
       </p:sp>
@@ -2721,7 +3365,7 @@
           </a:prstGeom>
           <a:extLst>
             <a:ext uri="{C572A759-6A51-4108-AA02-DFA0A04FC94B}">
-              <ma14:wrappingTextBoxFlag xmlns="" xmlns:ma14="http://schemas.microsoft.com/office/mac/drawingml/2011/main" val="0"/>
+              <ma14:wrappingTextBoxFlag xmlns:ma14="http://schemas.microsoft.com/office/mac/drawingml/2011/main" xmlns="" val="0"/>
             </a:ext>
           </a:extLst>
         </p:spPr>
@@ -3097,7 +3741,7 @@
           </a:prstGeom>
           <a:extLst>
             <a:ext uri="{C572A759-6A51-4108-AA02-DFA0A04FC94B}">
-              <ma14:wrappingTextBoxFlag xmlns="" xmlns:ma14="http://schemas.microsoft.com/office/mac/drawingml/2011/main" val="0"/>
+              <ma14:wrappingTextBoxFlag xmlns:ma14="http://schemas.microsoft.com/office/mac/drawingml/2011/main" xmlns="" val="0"/>
             </a:ext>
           </a:extLst>
         </p:spPr>
@@ -3861,7 +4505,7 @@
           </a:prstGeom>
           <a:extLst>
             <a:ext uri="{C572A759-6A51-4108-AA02-DFA0A04FC94B}">
-              <ma14:wrappingTextBoxFlag xmlns="" xmlns:ma14="http://schemas.microsoft.com/office/mac/drawingml/2011/main" val="0"/>
+              <ma14:wrappingTextBoxFlag xmlns:ma14="http://schemas.microsoft.com/office/mac/drawingml/2011/main" xmlns="" val="0"/>
             </a:ext>
           </a:extLst>
         </p:spPr>
@@ -4497,7 +5141,7 @@
           </a:prstGeom>
           <a:extLst>
             <a:ext uri="{C572A759-6A51-4108-AA02-DFA0A04FC94B}">
-              <ma14:wrappingTextBoxFlag xmlns="" xmlns:ma14="http://schemas.microsoft.com/office/mac/drawingml/2011/main" val="0"/>
+              <ma14:wrappingTextBoxFlag xmlns:ma14="http://schemas.microsoft.com/office/mac/drawingml/2011/main" xmlns="" val="0"/>
             </a:ext>
           </a:extLst>
         </p:spPr>
@@ -6294,7 +6938,7 @@
           </a:prstGeom>
           <a:extLst>
             <a:ext uri="{C572A759-6A51-4108-AA02-DFA0A04FC94B}">
-              <ma14:wrappingTextBoxFlag xmlns="" xmlns:ma14="http://schemas.microsoft.com/office/mac/drawingml/2011/main" val="0"/>
+              <ma14:wrappingTextBoxFlag xmlns:ma14="http://schemas.microsoft.com/office/mac/drawingml/2011/main" xmlns="" val="0"/>
             </a:ext>
           </a:extLst>
         </p:spPr>
@@ -7208,7 +7852,7 @@
           </a:prstGeom>
           <a:extLst>
             <a:ext uri="{C572A759-6A51-4108-AA02-DFA0A04FC94B}">
-              <ma14:wrappingTextBoxFlag xmlns="" xmlns:ma14="http://schemas.microsoft.com/office/mac/drawingml/2011/main" val="0"/>
+              <ma14:wrappingTextBoxFlag xmlns:ma14="http://schemas.microsoft.com/office/mac/drawingml/2011/main" xmlns="" val="0"/>
             </a:ext>
           </a:extLst>
         </p:spPr>
@@ -8206,7 +8850,7 @@
           </a:prstGeom>
           <a:extLst>
             <a:ext uri="{C572A759-6A51-4108-AA02-DFA0A04FC94B}">
-              <ma14:wrappingTextBoxFlag xmlns="" xmlns:ma14="http://schemas.microsoft.com/office/mac/drawingml/2011/main" val="0"/>
+              <ma14:wrappingTextBoxFlag xmlns:ma14="http://schemas.microsoft.com/office/mac/drawingml/2011/main" xmlns="" val="0"/>
             </a:ext>
           </a:extLst>
         </p:spPr>
@@ -9855,7 +10499,7 @@
           </a:prstGeom>
           <a:extLst>
             <a:ext uri="{C572A759-6A51-4108-AA02-DFA0A04FC94B}">
-              <ma14:wrappingTextBoxFlag xmlns="" xmlns:ma14="http://schemas.microsoft.com/office/mac/drawingml/2011/main" val="0"/>
+              <ma14:wrappingTextBoxFlag xmlns:ma14="http://schemas.microsoft.com/office/mac/drawingml/2011/main" xmlns="" val="0"/>
             </a:ext>
           </a:extLst>
         </p:spPr>
@@ -10643,7 +11287,7 @@
           </a:prstGeom>
           <a:extLst>
             <a:ext uri="{C572A759-6A51-4108-AA02-DFA0A04FC94B}">
-              <ma14:wrappingTextBoxFlag xmlns="" xmlns:ma14="http://schemas.microsoft.com/office/mac/drawingml/2011/main" val="0"/>
+              <ma14:wrappingTextBoxFlag xmlns:ma14="http://schemas.microsoft.com/office/mac/drawingml/2011/main" xmlns="" val="0"/>
             </a:ext>
           </a:extLst>
         </p:spPr>
@@ -11317,7 +11961,7 @@
           </a:prstGeom>
           <a:extLst>
             <a:ext uri="{C572A759-6A51-4108-AA02-DFA0A04FC94B}">
-              <ma14:wrappingTextBoxFlag xmlns="" xmlns:ma14="http://schemas.microsoft.com/office/mac/drawingml/2011/main" val="0"/>
+              <ma14:wrappingTextBoxFlag xmlns:ma14="http://schemas.microsoft.com/office/mac/drawingml/2011/main" xmlns="" val="0"/>
             </a:ext>
           </a:extLst>
         </p:spPr>
@@ -11649,6 +12293,301 @@
 </file>
 
 <file path=ppt/theme/theme2.xml><?xml version="1.0" encoding="utf-8"?>
+<a:theme xmlns:a="http://schemas.openxmlformats.org/drawingml/2006/main" name="1_Office Theme">
+  <a:themeElements>
+    <a:clrScheme name="Office">
+      <a:dk1>
+        <a:sysClr val="windowText" lastClr="000000"/>
+      </a:dk1>
+      <a:lt1>
+        <a:sysClr val="window" lastClr="FFFFFF"/>
+      </a:lt1>
+      <a:dk2>
+        <a:srgbClr val="44546A"/>
+      </a:dk2>
+      <a:lt2>
+        <a:srgbClr val="E7E6E6"/>
+      </a:lt2>
+      <a:accent1>
+        <a:srgbClr val="4472C4"/>
+      </a:accent1>
+      <a:accent2>
+        <a:srgbClr val="ED7D31"/>
+      </a:accent2>
+      <a:accent3>
+        <a:srgbClr val="A5A5A5"/>
+      </a:accent3>
+      <a:accent4>
+        <a:srgbClr val="FFC000"/>
+      </a:accent4>
+      <a:accent5>
+        <a:srgbClr val="5B9BD5"/>
+      </a:accent5>
+      <a:accent6>
+        <a:srgbClr val="70AD47"/>
+      </a:accent6>
+      <a:hlink>
+        <a:srgbClr val="0563C1"/>
+      </a:hlink>
+      <a:folHlink>
+        <a:srgbClr val="954F72"/>
+      </a:folHlink>
+    </a:clrScheme>
+    <a:fontScheme name="Office">
+      <a:majorFont>
+        <a:latin typeface="Aptos Display"/>
+        <a:ea typeface=""/>
+        <a:cs typeface=""/>
+        <a:font script="Jpan" typeface="游ゴシック Light"/>
+        <a:font script="Hang" typeface="맑은 고딕"/>
+        <a:font script="Hans" typeface="等线 Light"/>
+        <a:font script="Hant" typeface="新細明體"/>
+        <a:font script="Arab" typeface="Times New Roman"/>
+        <a:font script="Hebr" typeface="Times New Roman"/>
+        <a:font script="Thai" typeface="Angsana New"/>
+        <a:font script="Ethi" typeface="Nyala"/>
+        <a:font script="Beng" typeface="Vrinda"/>
+        <a:font script="Gujr" typeface="Shruti"/>
+        <a:font script="Khmr" typeface="MoolBoran"/>
+        <a:font script="Knda" typeface="Tunga"/>
+        <a:font script="Guru" typeface="Raavi"/>
+        <a:font script="Cans" typeface="Euphemia"/>
+        <a:font script="Cher" typeface="Plantagenet Cherokee"/>
+        <a:font script="Yiii" typeface="Microsoft Yi Baiti"/>
+        <a:font script="Tibt" typeface="Microsoft Himalaya"/>
+        <a:font script="Thaa" typeface="MV Boli"/>
+        <a:font script="Deva" typeface="Mangal"/>
+        <a:font script="Telu" typeface="Gautami"/>
+        <a:font script="Taml" typeface="Latha"/>
+        <a:font script="Syrc" typeface="Estrangelo Edessa"/>
+        <a:font script="Orya" typeface="Kalinga"/>
+        <a:font script="Mlym" typeface="Kartika"/>
+        <a:font script="Laoo" typeface="DokChampa"/>
+        <a:font script="Sinh" typeface="Iskoola Pota"/>
+        <a:font script="Mong" typeface="Mongolian Baiti"/>
+        <a:font script="Viet" typeface="Times New Roman"/>
+        <a:font script="Uigh" typeface="Microsoft Uighur"/>
+        <a:font script="Geor" typeface="Sylfaen"/>
+        <a:font script="Armn" typeface="Arial"/>
+        <a:font script="Bugi" typeface="Leelawadee UI"/>
+        <a:font script="Bopo" typeface="Microsoft JhengHei"/>
+        <a:font script="Java" typeface="Javanese Text"/>
+        <a:font script="Lisu" typeface="Segoe UI"/>
+        <a:font script="Mymr" typeface="Myanmar Text"/>
+        <a:font script="Nkoo" typeface="Ebrima"/>
+        <a:font script="Olck" typeface="Nirmala UI"/>
+        <a:font script="Osma" typeface="Ebrima"/>
+        <a:font script="Phag" typeface="Phagspa"/>
+        <a:font script="Syrn" typeface="Estrangelo Edessa"/>
+        <a:font script="Syrj" typeface="Estrangelo Edessa"/>
+        <a:font script="Syre" typeface="Estrangelo Edessa"/>
+        <a:font script="Sora" typeface="Nirmala UI"/>
+        <a:font script="Tale" typeface="Microsoft Tai Le"/>
+        <a:font script="Talu" typeface="Microsoft New Tai Lue"/>
+        <a:font script="Tfng" typeface="Ebrima"/>
+      </a:majorFont>
+      <a:minorFont>
+        <a:latin typeface="Aptos"/>
+        <a:ea typeface=""/>
+        <a:cs typeface=""/>
+        <a:font script="Jpan" typeface="游ゴシック"/>
+        <a:font script="Hang" typeface="맑은 고딕"/>
+        <a:font script="Hans" typeface="等线"/>
+        <a:font script="Hant" typeface="新細明體"/>
+        <a:font script="Arab" typeface="Arial"/>
+        <a:font script="Hebr" typeface="Arial"/>
+        <a:font script="Thai" typeface="Cordia New"/>
+        <a:font script="Ethi" typeface="Nyala"/>
+        <a:font script="Beng" typeface="Vrinda"/>
+        <a:font script="Gujr" typeface="Shruti"/>
+        <a:font script="Khmr" typeface="DaunPenh"/>
+        <a:font script="Knda" typeface="Tunga"/>
+        <a:font script="Guru" typeface="Raavi"/>
+        <a:font script="Cans" typeface="Euphemia"/>
+        <a:font script="Cher" typeface="Plantagenet Cherokee"/>
+        <a:font script="Yiii" typeface="Microsoft Yi Baiti"/>
+        <a:font script="Tibt" typeface="Microsoft Himalaya"/>
+        <a:font script="Thaa" typeface="MV Boli"/>
+        <a:font script="Deva" typeface="Mangal"/>
+        <a:font script="Telu" typeface="Gautami"/>
+        <a:font script="Taml" typeface="Latha"/>
+        <a:font script="Syrc" typeface="Estrangelo Edessa"/>
+        <a:font script="Orya" typeface="Kalinga"/>
+        <a:font script="Mlym" typeface="Kartika"/>
+        <a:font script="Laoo" typeface="DokChampa"/>
+        <a:font script="Sinh" typeface="Iskoola Pota"/>
+        <a:font script="Mong" typeface="Mongolian Baiti"/>
+        <a:font script="Viet" typeface="Arial"/>
+        <a:font script="Uigh" typeface="Microsoft Uighur"/>
+        <a:font script="Geor" typeface="Sylfaen"/>
+        <a:font script="Armn" typeface="Arial"/>
+        <a:font script="Bugi" typeface="Leelawadee UI"/>
+        <a:font script="Bopo" typeface="Microsoft JhengHei"/>
+        <a:font script="Java" typeface="Javanese Text"/>
+        <a:font script="Lisu" typeface="Segoe UI"/>
+        <a:font script="Mymr" typeface="Myanmar Text"/>
+        <a:font script="Nkoo" typeface="Ebrima"/>
+        <a:font script="Olck" typeface="Nirmala UI"/>
+        <a:font script="Osma" typeface="Ebrima"/>
+        <a:font script="Phag" typeface="Phagspa"/>
+        <a:font script="Syrn" typeface="Estrangelo Edessa"/>
+        <a:font script="Syrj" typeface="Estrangelo Edessa"/>
+        <a:font script="Syre" typeface="Estrangelo Edessa"/>
+        <a:font script="Sora" typeface="Nirmala UI"/>
+        <a:font script="Tale" typeface="Microsoft Tai Le"/>
+        <a:font script="Talu" typeface="Microsoft New Tai Lue"/>
+        <a:font script="Tfng" typeface="Ebrima"/>
+      </a:minorFont>
+    </a:fontScheme>
+    <a:fmtScheme name="Office">
+      <a:fillStyleLst>
+        <a:solidFill>
+          <a:schemeClr val="phClr"/>
+        </a:solidFill>
+        <a:gradFill rotWithShape="1">
+          <a:gsLst>
+            <a:gs pos="0">
+              <a:schemeClr val="phClr">
+                <a:lumMod val="110000"/>
+                <a:satMod val="105000"/>
+                <a:tint val="67000"/>
+              </a:schemeClr>
+            </a:gs>
+            <a:gs pos="50000">
+              <a:schemeClr val="phClr">
+                <a:lumMod val="105000"/>
+                <a:satMod val="103000"/>
+                <a:tint val="73000"/>
+              </a:schemeClr>
+            </a:gs>
+            <a:gs pos="100000">
+              <a:schemeClr val="phClr">
+                <a:lumMod val="105000"/>
+                <a:satMod val="109000"/>
+                <a:tint val="81000"/>
+              </a:schemeClr>
+            </a:gs>
+          </a:gsLst>
+          <a:lin ang="5400000" scaled="0"/>
+        </a:gradFill>
+        <a:gradFill rotWithShape="1">
+          <a:gsLst>
+            <a:gs pos="0">
+              <a:schemeClr val="phClr">
+                <a:satMod val="103000"/>
+                <a:lumMod val="102000"/>
+                <a:tint val="94000"/>
+              </a:schemeClr>
+            </a:gs>
+            <a:gs pos="50000">
+              <a:schemeClr val="phClr">
+                <a:satMod val="110000"/>
+                <a:lumMod val="100000"/>
+                <a:shade val="100000"/>
+              </a:schemeClr>
+            </a:gs>
+            <a:gs pos="100000">
+              <a:schemeClr val="phClr">
+                <a:lumMod val="99000"/>
+                <a:satMod val="120000"/>
+                <a:shade val="78000"/>
+              </a:schemeClr>
+            </a:gs>
+          </a:gsLst>
+          <a:lin ang="5400000" scaled="0"/>
+        </a:gradFill>
+      </a:fillStyleLst>
+      <a:lnStyleLst>
+        <a:ln w="6350" cap="flat" cmpd="sng" algn="ctr">
+          <a:solidFill>
+            <a:schemeClr val="phClr"/>
+          </a:solidFill>
+          <a:prstDash val="solid"/>
+          <a:miter lim="800000"/>
+        </a:ln>
+        <a:ln w="12700" cap="flat" cmpd="sng" algn="ctr">
+          <a:solidFill>
+            <a:schemeClr val="phClr"/>
+          </a:solidFill>
+          <a:prstDash val="solid"/>
+          <a:miter lim="800000"/>
+        </a:ln>
+        <a:ln w="19050" cap="flat" cmpd="sng" algn="ctr">
+          <a:solidFill>
+            <a:schemeClr val="phClr"/>
+          </a:solidFill>
+          <a:prstDash val="solid"/>
+          <a:miter lim="800000"/>
+        </a:ln>
+      </a:lnStyleLst>
+      <a:effectStyleLst>
+        <a:effectStyle>
+          <a:effectLst/>
+        </a:effectStyle>
+        <a:effectStyle>
+          <a:effectLst/>
+        </a:effectStyle>
+        <a:effectStyle>
+          <a:effectLst>
+            <a:outerShdw blurRad="57150" dist="19050" dir="5400000" algn="ctr" rotWithShape="0">
+              <a:srgbClr val="000000">
+                <a:alpha val="63000"/>
+              </a:srgbClr>
+            </a:outerShdw>
+          </a:effectLst>
+        </a:effectStyle>
+      </a:effectStyleLst>
+      <a:bgFillStyleLst>
+        <a:solidFill>
+          <a:schemeClr val="phClr"/>
+        </a:solidFill>
+        <a:solidFill>
+          <a:schemeClr val="phClr">
+            <a:tint val="95000"/>
+            <a:satMod val="170000"/>
+          </a:schemeClr>
+        </a:solidFill>
+        <a:gradFill rotWithShape="1">
+          <a:gsLst>
+            <a:gs pos="0">
+              <a:schemeClr val="phClr">
+                <a:tint val="93000"/>
+                <a:satMod val="150000"/>
+                <a:shade val="98000"/>
+                <a:lumMod val="102000"/>
+              </a:schemeClr>
+            </a:gs>
+            <a:gs pos="50000">
+              <a:schemeClr val="phClr">
+                <a:tint val="98000"/>
+                <a:satMod val="130000"/>
+                <a:shade val="90000"/>
+                <a:lumMod val="103000"/>
+              </a:schemeClr>
+            </a:gs>
+            <a:gs pos="100000">
+              <a:schemeClr val="phClr">
+                <a:shade val="63000"/>
+                <a:satMod val="120000"/>
+              </a:schemeClr>
+            </a:gs>
+          </a:gsLst>
+          <a:lin ang="5400000" scaled="0"/>
+        </a:gradFill>
+      </a:bgFillStyleLst>
+    </a:fmtScheme>
+  </a:themeElements>
+  <a:objectDefaults/>
+  <a:extraClrSchemeLst/>
+  <a:extLst>
+    <a:ext uri="{05A4C25C-085E-4340-85A3-A5531E510DB2}">
+      <thm15:themeFamily xmlns:thm15="http://schemas.microsoft.com/office/thememl/2012/main" name="Office Theme" id="{62F939B6-93AF-4DB8-9C6B-D6C7DFDC589F}" vid="{4A3C46E8-61CC-4603-A589-7422A47A8E4A}"/>
+    </a:ext>
+  </a:extLst>
+</a:theme>
+</file>
+
+<file path=ppt/theme/theme3.xml><?xml version="1.0" encoding="utf-8"?>
 <a:theme xmlns:a="http://schemas.openxmlformats.org/drawingml/2006/main" name="Office Theme">
   <a:themeElements>
     <a:clrScheme name="Office">
